--- a/论文图片/图片转pdf/第四章/总体架构图.pptx
+++ b/论文图片/图片转pdf/第四章/总体架构图.pptx
@@ -3082,8 +3082,9 @@
               <a:solidFill>
                 <a:schemeClr val="tx1"/>
               </a:solidFill>
-              <a:latin typeface="宋体" panose="02010600030101010101" pitchFamily="2" charset="-122"/>
+              <a:latin typeface="Times New Roman" panose="02020603050405020304" charset="0"/>
               <a:ea typeface="宋体" panose="02010600030101010101" pitchFamily="2" charset="-122"/>
+              <a:cs typeface="Times New Roman" panose="02020603050405020304" charset="0"/>
             </a:endParaRPr>
           </a:p>
         </p:txBody>
@@ -3143,7 +3144,15 @@
               </a:rPr>
               <a:t>实时渲染阶段</a:t>
             </a:r>
-            <a:endParaRPr lang="zh-CN" altLang="en-US" sz="1600"/>
+            <a:endParaRPr lang="zh-CN" altLang="en-US" sz="1600" b="1">
+              <a:solidFill>
+                <a:schemeClr val="tx1"/>
+              </a:solidFill>
+              <a:latin typeface="Times New Roman" panose="02020603050405020304" charset="0"/>
+              <a:ea typeface="宋体" panose="02010600030101010101" pitchFamily="2" charset="-122"/>
+              <a:cs typeface="Times New Roman" panose="02020603050405020304" charset="0"/>
+              <a:sym typeface="+mn-ea"/>
+            </a:endParaRPr>
           </a:p>
         </p:txBody>
       </p:sp>
@@ -3227,7 +3236,7 @@
           <a:p>
             <a:pPr algn="l"/>
             <a:r>
-              <a:rPr lang="en-US" altLang="zh-CN" sz="1600" b="1">
+              <a:rPr lang="en-US" altLang="zh-CN" sz="1600">
                 <a:solidFill>
                   <a:schemeClr val="tx1"/>
                 </a:solidFill>
@@ -3237,7 +3246,7 @@
               <a:t>   </a:t>
             </a:r>
             <a:r>
-              <a:rPr lang="zh-CN" altLang="en-US" sz="1600" b="1">
+              <a:rPr lang="zh-CN" altLang="en-US" sz="1600">
                 <a:solidFill>
                   <a:schemeClr val="tx1"/>
                 </a:solidFill>
@@ -3247,7 +3256,7 @@
               <a:t>输入：动画网格序列</a:t>
             </a:r>
             <a:r>
-              <a:rPr lang="en-US" altLang="zh-CN" sz="1600" b="1">
+              <a:rPr lang="en-US" altLang="zh-CN" sz="1600">
                 <a:solidFill>
                   <a:schemeClr val="tx1"/>
                 </a:solidFill>
@@ -3257,7 +3266,7 @@
               <a:t>(</a:t>
             </a:r>
             <a:r>
-              <a:rPr lang="zh-CN" altLang="en-US" sz="1600" b="1">
+              <a:rPr lang="zh-CN" altLang="en-US" sz="1600">
                 <a:solidFill>
                   <a:schemeClr val="tx1"/>
                 </a:solidFill>
@@ -3267,7 +3276,7 @@
               <a:t>原始高精度</a:t>
             </a:r>
             <a:r>
-              <a:rPr lang="en-US" altLang="zh-CN" sz="1600" b="1">
+              <a:rPr lang="en-US" altLang="zh-CN" sz="1600">
                 <a:solidFill>
                   <a:schemeClr val="tx1"/>
                 </a:solidFill>
@@ -3276,7 +3285,7 @@
               </a:rPr>
               <a:t>) </a:t>
             </a:r>
-            <a:endParaRPr lang="en-US" altLang="zh-CN" sz="1600" b="1">
+            <a:endParaRPr lang="en-US" altLang="zh-CN" sz="1600">
               <a:solidFill>
                 <a:schemeClr val="tx1"/>
               </a:solidFill>
@@ -3308,7 +3317,7 @@
           </a:bodyPr>
           <a:p>
             <a:r>
-              <a:rPr lang="zh-CN" altLang="en-US" sz="1600" b="1">
+              <a:rPr lang="zh-CN" altLang="en-US" sz="1600">
                 <a:solidFill>
                   <a:schemeClr val="tx1"/>
                 </a:solidFill>
@@ -3318,7 +3327,7 @@
               </a:rPr>
               <a:t>时空特征驱动的动画网格层次简化算法</a:t>
             </a:r>
-            <a:endParaRPr lang="zh-CN" altLang="en-US" sz="1600" b="1">
+            <a:endParaRPr lang="zh-CN" altLang="en-US" sz="1600">
               <a:solidFill>
                 <a:schemeClr val="tx1"/>
               </a:solidFill>
@@ -3389,7 +3398,7 @@
           <a:bodyPr rtlCol="0" anchor="ctr"/>
           <a:p>
             <a:pPr algn="l"/>
-            <a:endParaRPr lang="en-US" altLang="zh-CN" sz="1600" b="1">
+            <a:endParaRPr lang="en-US" altLang="zh-CN" sz="1600">
               <a:solidFill>
                 <a:schemeClr val="tx1"/>
               </a:solidFill>
@@ -3421,7 +3430,7 @@
           </a:bodyPr>
           <a:p>
             <a:r>
-              <a:rPr lang="zh-CN" altLang="en-US" sz="1600" b="1">
+              <a:rPr lang="zh-CN" altLang="en-US" sz="1600">
                 <a:solidFill>
                   <a:schemeClr val="tx1"/>
                 </a:solidFill>
@@ -3431,7 +3440,7 @@
               </a:rPr>
               <a:t>时空运动特征分析模块</a:t>
             </a:r>
-            <a:endParaRPr lang="en-US" altLang="zh-CN" sz="1600" b="1">
+            <a:endParaRPr lang="zh-CN" altLang="en-US" sz="1600">
               <a:solidFill>
                 <a:schemeClr val="tx1"/>
               </a:solidFill>
@@ -3485,13 +3494,13 @@
           <a:p>
             <a:pPr algn="l"/>
             <a:r>
-              <a:rPr lang="zh-CN" altLang="en-US" sz="1400" b="1">
+              <a:rPr lang="zh-CN" altLang="en-US" sz="1400">
                 <a:latin typeface="宋体" panose="02010600030101010101" pitchFamily="2" charset="-122"/>
                 <a:ea typeface="宋体" panose="02010600030101010101" pitchFamily="2" charset="-122"/>
               </a:rPr>
               <a:t>空间结构特征提取</a:t>
             </a:r>
-            <a:endParaRPr lang="zh-CN" altLang="en-US" sz="1400" b="1">
+            <a:endParaRPr lang="zh-CN" altLang="en-US" sz="1400">
               <a:latin typeface="宋体" panose="02010600030101010101" pitchFamily="2" charset="-122"/>
               <a:ea typeface="宋体" panose="02010600030101010101" pitchFamily="2" charset="-122"/>
             </a:endParaRPr>
@@ -3565,27 +3574,27 @@
           <a:p>
             <a:pPr algn="r"/>
             <a:r>
-              <a:rPr lang="en-US" altLang="zh-CN" sz="1400" b="1">
+              <a:rPr lang="en-US" altLang="zh-CN" sz="1400">
                 <a:latin typeface="宋体" panose="02010600030101010101" pitchFamily="2" charset="-122"/>
                 <a:ea typeface="宋体" panose="02010600030101010101" pitchFamily="2" charset="-122"/>
               </a:rPr>
               <a:t>  </a:t>
             </a:r>
             <a:r>
-              <a:rPr lang="zh-CN" altLang="en-US" sz="1400" b="1">
+              <a:rPr lang="zh-CN" altLang="en-US" sz="1400">
                 <a:latin typeface="宋体" panose="02010600030101010101" pitchFamily="2" charset="-122"/>
                 <a:ea typeface="宋体" panose="02010600030101010101" pitchFamily="2" charset="-122"/>
               </a:rPr>
               <a:t>空间结构特征提取</a:t>
             </a:r>
             <a:r>
-              <a:rPr lang="en-US" altLang="zh-CN" sz="1400" b="1">
+              <a:rPr lang="en-US" altLang="zh-CN" sz="1400">
                 <a:latin typeface="宋体" panose="02010600030101010101" pitchFamily="2" charset="-122"/>
                 <a:ea typeface="宋体" panose="02010600030101010101" pitchFamily="2" charset="-122"/>
               </a:rPr>
               <a:t>  </a:t>
             </a:r>
-            <a:endParaRPr lang="en-US" altLang="zh-CN" sz="1400" b="1">
+            <a:endParaRPr lang="en-US" altLang="zh-CN" sz="1400">
               <a:latin typeface="宋体" panose="02010600030101010101" pitchFamily="2" charset="-122"/>
               <a:ea typeface="宋体" panose="02010600030101010101" pitchFamily="2" charset="-122"/>
             </a:endParaRPr>
@@ -3698,7 +3707,7 @@
           <a:p>
             <a:pPr algn="ctr"/>
             <a:r>
-              <a:rPr lang="zh-CN" altLang="en-US" sz="1600" b="1">
+              <a:rPr lang="zh-CN" altLang="en-US" sz="1600">
                 <a:solidFill>
                   <a:schemeClr val="tx1"/>
                 </a:solidFill>
@@ -3708,12 +3717,13 @@
               </a:rPr>
               <a:t>时空运动特征重要性度量模型</a:t>
             </a:r>
-            <a:endParaRPr lang="en-US" altLang="zh-CN" sz="1600" b="1">
+            <a:endParaRPr lang="zh-CN" altLang="en-US" sz="1600">
               <a:solidFill>
                 <a:schemeClr val="tx1"/>
               </a:solidFill>
               <a:latin typeface="宋体" panose="02010600030101010101" pitchFamily="2" charset="-122"/>
               <a:ea typeface="宋体" panose="02010600030101010101" pitchFamily="2" charset="-122"/>
+              <a:sym typeface="+mn-ea"/>
             </a:endParaRPr>
           </a:p>
         </p:txBody>
@@ -3755,7 +3765,7 @@
           <a:p>
             <a:pPr algn="ctr"/>
             <a:r>
-              <a:rPr lang="zh-CN" altLang="en-US" sz="1600" b="1">
+              <a:rPr lang="zh-CN" altLang="en-US" sz="1600">
                 <a:solidFill>
                   <a:schemeClr val="tx1"/>
                 </a:solidFill>
@@ -3765,17 +3775,18 @@
               <a:t>输出：多层次的</a:t>
             </a:r>
             <a:r>
-              <a:rPr lang="en-US" altLang="zh-CN" sz="1600" b="1">
+              <a:rPr lang="en-US" altLang="zh-CN" sz="1600">
                 <a:solidFill>
                   <a:schemeClr val="tx1"/>
                 </a:solidFill>
-                <a:latin typeface="宋体" panose="02010600030101010101" pitchFamily="2" charset="-122"/>
+                <a:latin typeface="Times New Roman" panose="02020603050405020304" charset="0"/>
                 <a:ea typeface="宋体" panose="02010600030101010101" pitchFamily="2" charset="-122"/>
+                <a:cs typeface="Times New Roman" panose="02020603050405020304" charset="0"/>
               </a:rPr>
               <a:t>LOD</a:t>
             </a:r>
             <a:r>
-              <a:rPr lang="zh-CN" altLang="en-US" sz="1600" b="1">
+              <a:rPr lang="zh-CN" altLang="en-US" sz="1600">
                 <a:solidFill>
                   <a:schemeClr val="tx1"/>
                 </a:solidFill>
@@ -3785,7 +3796,7 @@
               <a:t>序列</a:t>
             </a:r>
             <a:r>
-              <a:rPr lang="en-US" altLang="zh-CN" sz="1600" b="1">
+              <a:rPr lang="en-US" altLang="zh-CN" sz="1600">
                 <a:solidFill>
                   <a:schemeClr val="tx1"/>
                 </a:solidFill>
@@ -3794,7 +3805,7 @@
               </a:rPr>
               <a:t> </a:t>
             </a:r>
-            <a:endParaRPr lang="en-US" altLang="zh-CN" sz="1600" b="1">
+            <a:endParaRPr lang="en-US" altLang="zh-CN" sz="1600">
               <a:solidFill>
                 <a:schemeClr val="tx1"/>
               </a:solidFill>
@@ -4000,7 +4011,7 @@
           <a:p>
             <a:pPr algn="ctr"/>
             <a:r>
-              <a:rPr lang="zh-CN" altLang="en-US" sz="1600" b="1">
+              <a:rPr lang="zh-CN" altLang="en-US" sz="1600">
                 <a:solidFill>
                   <a:schemeClr val="tx1"/>
                 </a:solidFill>
@@ -4009,7 +4020,7 @@
               </a:rPr>
               <a:t>基于时空特征的边折叠简化算法</a:t>
             </a:r>
-            <a:endParaRPr lang="zh-CN" altLang="en-US" sz="1600" b="1">
+            <a:endParaRPr lang="zh-CN" altLang="en-US" sz="1600">
               <a:solidFill>
                 <a:schemeClr val="tx1"/>
               </a:solidFill>
@@ -4137,7 +4148,7 @@
           </a:bodyPr>
           <a:p>
             <a:r>
-              <a:rPr lang="zh-CN" altLang="en-US" sz="1600" b="1">
+              <a:rPr lang="zh-CN" altLang="en-US" sz="1600">
                 <a:solidFill>
                   <a:schemeClr val="tx1"/>
                 </a:solidFill>
@@ -4148,18 +4159,19 @@
               <a:t>感知引导的自适应细分</a:t>
             </a:r>
             <a:r>
-              <a:rPr lang="en-US" altLang="zh-CN" sz="1600" b="1">
+              <a:rPr lang="en-US" altLang="zh-CN" sz="1600">
                 <a:solidFill>
                   <a:schemeClr val="tx1"/>
                 </a:solidFill>
-                <a:latin typeface="宋体" panose="02010600030101010101" pitchFamily="2" charset="-122"/>
+                <a:latin typeface="Times New Roman" panose="02020603050405020304" charset="0"/>
                 <a:ea typeface="宋体" panose="02010600030101010101" pitchFamily="2" charset="-122"/>
+                <a:cs typeface="Times New Roman" panose="02020603050405020304" charset="0"/>
                 <a:sym typeface="+mn-ea"/>
               </a:rPr>
               <a:t>LOD</a:t>
             </a:r>
             <a:r>
-              <a:rPr lang="zh-CN" altLang="en-US" sz="1600" b="1">
+              <a:rPr lang="zh-CN" altLang="en-US" sz="1600">
                 <a:solidFill>
                   <a:schemeClr val="tx1"/>
                 </a:solidFill>
@@ -4169,7 +4181,7 @@
               </a:rPr>
               <a:t>算法</a:t>
             </a:r>
-            <a:endParaRPr lang="zh-CN" altLang="en-US" sz="1600" b="1">
+            <a:endParaRPr lang="zh-CN" altLang="en-US" sz="1600">
               <a:solidFill>
                 <a:schemeClr val="tx1"/>
               </a:solidFill>
@@ -4202,7 +4214,7 @@
           </a:bodyPr>
           <a:p>
             <a:r>
-              <a:rPr lang="zh-CN" altLang="en-US" sz="1400" b="1">
+              <a:rPr lang="zh-CN" altLang="en-US" sz="1400">
                 <a:solidFill>
                   <a:schemeClr val="tx1"/>
                 </a:solidFill>
@@ -4213,18 +4225,19 @@
               <a:t>基础</a:t>
             </a:r>
             <a:r>
-              <a:rPr lang="en-US" altLang="zh-CN" sz="1400" b="1">
+              <a:rPr lang="en-US" altLang="zh-CN" sz="1400">
                 <a:solidFill>
                   <a:schemeClr val="tx1"/>
                 </a:solidFill>
-                <a:latin typeface="宋体" panose="02010600030101010101" pitchFamily="2" charset="-122"/>
+                <a:latin typeface="Times New Roman" panose="02020603050405020304" charset="0"/>
                 <a:ea typeface="宋体" panose="02010600030101010101" pitchFamily="2" charset="-122"/>
+                <a:cs typeface="Times New Roman" panose="02020603050405020304" charset="0"/>
                 <a:sym typeface="+mn-ea"/>
               </a:rPr>
               <a:t>LOD</a:t>
             </a:r>
             <a:r>
-              <a:rPr lang="zh-CN" altLang="en-US" sz="1400" b="1">
+              <a:rPr lang="zh-CN" altLang="en-US" sz="1400">
                 <a:solidFill>
                   <a:schemeClr val="tx1"/>
                 </a:solidFill>
@@ -4234,7 +4247,7 @@
               </a:rPr>
               <a:t>网格</a:t>
             </a:r>
-            <a:endParaRPr lang="zh-CN" altLang="en-US" sz="1400" b="1">
+            <a:endParaRPr lang="zh-CN" altLang="en-US" sz="1400">
               <a:solidFill>
                 <a:schemeClr val="tx1"/>
               </a:solidFill>
@@ -4287,7 +4300,7 @@
           <a:bodyPr rtlCol="0" anchor="ctr"/>
           <a:p>
             <a:pPr algn="l"/>
-            <a:endParaRPr lang="zh-CN" altLang="en-US" sz="1400" b="1">
+            <a:endParaRPr lang="zh-CN" altLang="en-US" sz="1400">
               <a:latin typeface="宋体" panose="02010600030101010101" pitchFamily="2" charset="-122"/>
               <a:ea typeface="宋体" panose="02010600030101010101" pitchFamily="2" charset="-122"/>
             </a:endParaRPr>
@@ -4336,7 +4349,7 @@
           <a:bodyPr rtlCol="0" anchor="ctr"/>
           <a:p>
             <a:pPr algn="l"/>
-            <a:endParaRPr lang="zh-CN" altLang="en-US" sz="1400" b="1">
+            <a:endParaRPr lang="zh-CN" altLang="en-US" sz="1400">
               <a:latin typeface="宋体" panose="02010600030101010101" pitchFamily="2" charset="-122"/>
               <a:ea typeface="宋体" panose="02010600030101010101" pitchFamily="2" charset="-122"/>
             </a:endParaRPr>
@@ -4385,7 +4398,7 @@
           <a:bodyPr rtlCol="0" anchor="ctr"/>
           <a:p>
             <a:pPr algn="l"/>
-            <a:endParaRPr lang="zh-CN" altLang="en-US" sz="1400" b="1">
+            <a:endParaRPr lang="zh-CN" altLang="en-US" sz="1400">
               <a:latin typeface="宋体" panose="02010600030101010101" pitchFamily="2" charset="-122"/>
               <a:ea typeface="宋体" panose="02010600030101010101" pitchFamily="2" charset="-122"/>
             </a:endParaRPr>
@@ -4438,7 +4451,7 @@
           </a:bodyPr>
           <a:p>
             <a:r>
-              <a:rPr lang="zh-CN" sz="1400" b="1">
+              <a:rPr lang="zh-CN" sz="1400">
                 <a:solidFill>
                   <a:schemeClr val="tx1"/>
                 </a:solidFill>
@@ -4448,7 +4461,7 @@
               </a:rPr>
               <a:t>实时注视点位置</a:t>
             </a:r>
-            <a:endParaRPr lang="zh-CN" sz="1400" b="1">
+            <a:endParaRPr lang="zh-CN" sz="1400">
               <a:solidFill>
                 <a:schemeClr val="tx1"/>
               </a:solidFill>
@@ -4505,7 +4518,7 @@
           </a:bodyPr>
           <a:p>
             <a:r>
-              <a:rPr lang="zh-CN" sz="1400" b="1">
+              <a:rPr lang="zh-CN" sz="1400">
                 <a:solidFill>
                   <a:schemeClr val="tx1"/>
                 </a:solidFill>
@@ -4515,7 +4528,7 @@
               </a:rPr>
               <a:t>分辨率缩放因子</a:t>
             </a:r>
-            <a:endParaRPr lang="zh-CN" sz="1400" b="1">
+            <a:endParaRPr lang="zh-CN" sz="1400">
               <a:solidFill>
                 <a:schemeClr val="tx1"/>
               </a:solidFill>
@@ -4587,7 +4600,7 @@
           <a:p>
             <a:pPr algn="ctr"/>
             <a:r>
-              <a:rPr lang="zh-CN" altLang="en-US" sz="1600" b="1">
+              <a:rPr lang="zh-CN" altLang="en-US" sz="1600">
                 <a:solidFill>
                   <a:schemeClr val="tx1"/>
                 </a:solidFill>
@@ -4598,18 +4611,19 @@
               <a:t>基础</a:t>
             </a:r>
             <a:r>
-              <a:rPr lang="en-US" altLang="zh-CN" sz="1600" b="1">
+              <a:rPr lang="en-US" altLang="zh-CN" sz="1600">
                 <a:solidFill>
                   <a:schemeClr val="tx1"/>
                 </a:solidFill>
-                <a:latin typeface="宋体" panose="02010600030101010101" pitchFamily="2" charset="-122"/>
+                <a:latin typeface="Times New Roman" panose="02020603050405020304" charset="0"/>
                 <a:ea typeface="宋体" panose="02010600030101010101" pitchFamily="2" charset="-122"/>
+                <a:cs typeface="Times New Roman" panose="02020603050405020304" charset="0"/>
                 <a:sym typeface="+mn-ea"/>
               </a:rPr>
               <a:t>LOD</a:t>
             </a:r>
             <a:r>
-              <a:rPr lang="zh-CN" altLang="en-US" sz="1600" b="1">
+              <a:rPr lang="zh-CN" altLang="en-US" sz="1600">
                 <a:solidFill>
                   <a:schemeClr val="tx1"/>
                 </a:solidFill>
@@ -4619,7 +4633,7 @@
               </a:rPr>
               <a:t>选择模块</a:t>
             </a:r>
-            <a:endParaRPr lang="zh-CN" altLang="en-US" sz="1600" b="1">
+            <a:endParaRPr lang="zh-CN" altLang="en-US" sz="1600">
               <a:solidFill>
                 <a:schemeClr val="tx1"/>
               </a:solidFill>
@@ -4760,7 +4774,7 @@
           <a:p>
             <a:pPr algn="ctr"/>
             <a:r>
-              <a:rPr lang="zh-CN" sz="1600" b="1">
+              <a:rPr lang="zh-CN" sz="1600">
                 <a:solidFill>
                   <a:schemeClr val="tx1"/>
                 </a:solidFill>
@@ -4770,7 +4784,7 @@
               </a:rPr>
               <a:t>自适应细分调度模块</a:t>
             </a:r>
-            <a:endParaRPr lang="zh-CN" sz="1600" b="1">
+            <a:endParaRPr lang="zh-CN" sz="1600">
               <a:solidFill>
                 <a:schemeClr val="tx1"/>
               </a:solidFill>
@@ -4911,18 +4925,19 @@
           <a:p>
             <a:pPr algn="ctr"/>
             <a:r>
-              <a:rPr lang="en-US" altLang="zh-CN" sz="1600" b="1">
+              <a:rPr lang="en-US" altLang="zh-CN" sz="1600">
                 <a:solidFill>
                   <a:schemeClr val="tx1"/>
                 </a:solidFill>
-                <a:latin typeface="宋体" panose="02010600030101010101" pitchFamily="2" charset="-122"/>
+                <a:latin typeface="Times New Roman" panose="02020603050405020304" charset="0"/>
                 <a:ea typeface="宋体" panose="02010600030101010101" pitchFamily="2" charset="-122"/>
+                <a:cs typeface="Times New Roman" panose="02020603050405020304" charset="0"/>
                 <a:sym typeface="+mn-ea"/>
               </a:rPr>
               <a:t>GPU</a:t>
             </a:r>
             <a:r>
-              <a:rPr lang="zh-CN" altLang="en-US" sz="1600" b="1">
+              <a:rPr lang="zh-CN" altLang="en-US" sz="1600">
                 <a:solidFill>
                   <a:schemeClr val="tx1"/>
                 </a:solidFill>
@@ -4932,7 +4947,7 @@
               </a:rPr>
               <a:t>硬件镶嵌单元执行</a:t>
             </a:r>
-            <a:endParaRPr lang="zh-CN" altLang="en-US" sz="1600" b="1">
+            <a:endParaRPr lang="zh-CN" altLang="en-US" sz="1600">
               <a:solidFill>
                 <a:schemeClr val="tx1"/>
               </a:solidFill>
@@ -5072,7 +5087,7 @@
           <a:bodyPr rtlCol="0" anchor="ctr"/>
           <a:p>
             <a:pPr algn="ctr"/>
-            <a:endParaRPr lang="zh-CN" altLang="en-US" sz="1600" b="1">
+            <a:endParaRPr lang="zh-CN" altLang="en-US" sz="1600">
               <a:solidFill>
                 <a:schemeClr val="tx1"/>
               </a:solidFill>
@@ -5151,7 +5166,7 @@
           <a:p>
             <a:pPr algn="ctr"/>
             <a:r>
-              <a:rPr lang="zh-CN" sz="1600" b="1">
+              <a:rPr lang="zh-CN" sz="1600">
                 <a:solidFill>
                   <a:schemeClr val="tx1"/>
                 </a:solidFill>
@@ -5161,7 +5176,7 @@
               </a:rPr>
               <a:t>输出：最终渲染画面</a:t>
             </a:r>
-            <a:endParaRPr lang="zh-CN" sz="1600" b="1">
+            <a:endParaRPr lang="zh-CN" sz="1600">
               <a:solidFill>
                 <a:schemeClr val="tx1"/>
               </a:solidFill>
@@ -5171,7 +5186,7 @@
             </a:endParaRPr>
           </a:p>
           <a:p>
-            <a:endParaRPr lang="zh-CN" sz="1400" b="1">
+            <a:endParaRPr lang="zh-CN" sz="1600">
               <a:solidFill>
                 <a:schemeClr val="tx1"/>
               </a:solidFill>
@@ -5190,7 +5205,7 @@
         </p:nvSpPr>
         <p:spPr>
           <a:xfrm>
-            <a:off x="7771765" y="6193155"/>
+            <a:off x="7807325" y="6193155"/>
             <a:ext cx="3386455" cy="323215"/>
           </a:xfrm>
           <a:prstGeom prst="rect">
@@ -5204,7 +5219,7 @@
           </a:bodyPr>
           <a:p>
             <a:r>
-              <a:rPr lang="zh-CN" sz="1400" b="1">
+              <a:rPr lang="zh-CN" sz="1400">
                 <a:solidFill>
                   <a:schemeClr val="tx1"/>
                 </a:solidFill>
@@ -5214,7 +5229,7 @@
               </a:rPr>
               <a:t>注视区域高细节，外围区域低细节</a:t>
             </a:r>
-            <a:endParaRPr lang="zh-CN" sz="1400" b="1">
+            <a:endParaRPr lang="zh-CN" sz="1400">
               <a:solidFill>
                 <a:schemeClr val="tx1"/>
               </a:solidFill>
